--- a/classes/parte-0-prerrequisitos/003-git-y-github-para-data-scientists/clase-003-git-y-github-para-data-scientists-presentacion.pptx
+++ b/classes/parte-0-prerrequisitos/003-git-y-github-para-data-scientists/clase-003-git-y-github-para-data-scientists-presentacion.pptx
@@ -3272,7 +3272,7 @@
                 </a:solidFill>
                 <a:latin typeface="Segoe UI"/>
               </a:rPr>
-              <a:t>Parte: 0 — Prerrequisitos · Fuente: Pro Git (Chacon &amp; Straub) — caps. 2 y 3 · GitHub docs. · Duración estimada: 120 min.</a:t>
+              <a:t>Parte: 0 — Prerrequisitos · Fuente: Pro Git (Chacon &amp; Straub) — caps. 2 y 3 · GitHub docs. · Duración estimada: 120 min. · Nivel: Básico</a:t>
             </a:r>
           </a:p>
         </p:txBody>
@@ -3581,7 +3581,7 @@
                 </a:solidFill>
                 <a:latin typeface="Segoe UI"/>
               </a:rPr>
-              <a:t>Parte: 0 — Prerrequisitos · Fuente: Pro Git (Chacon &amp; Straub) — caps. 2 y 3 · GitHub docs. · Duración estimada: 120 min.</a:t>
+              <a:t>Parte: 0 — Prerrequisitos · Fuente: Pro Git (Chacon &amp; Straub) — caps. 2 y 3 · GitHub docs. · Duración estimada: 120 min. · Nivel: Básico</a:t>
             </a:r>
           </a:p>
         </p:txBody>
